--- a/presentation/記憶の宮殿説明イラスト.pptx
+++ b/presentation/記憶の宮殿説明イラスト.pptx
@@ -13,6 +13,9 @@
     <p:sldId id="258" r:id="rId8"/>
     <p:sldId id="259" r:id="rId9"/>
     <p:sldId id="260" r:id="rId10"/>
+    <p:sldId id="261" r:id="rId11"/>
+    <p:sldId id="262" r:id="rId12"/>
+    <p:sldId id="263" r:id="rId13"/>
   </p:sldIdLst>
   <p:sldSz cy="5143500" cx="9144000"/>
   <p:notesSz cx="6858000" cy="9144000"/>
@@ -1141,6 +1144,303 @@
       <p:sp>
         <p:nvSpPr>
           <p:cNvPr id="114" name="Google Shape;114;h3c2ed2f615f9a20e_0_127:notes"/>
+          <p:cNvSpPr txBox="1"/>
+          <p:nvPr>
+            <p:ph idx="1" type="body"/>
+          </p:nvPr>
+        </p:nvSpPr>
+        <p:spPr>
+          <a:xfrm>
+            <a:off x="685800" y="4343400"/>
+            <a:ext cx="5486400" cy="4114800"/>
+          </a:xfrm>
+          <a:prstGeom prst="rect">
+            <a:avLst/>
+          </a:prstGeom>
+        </p:spPr>
+        <p:txBody>
+          <a:bodyPr anchorCtr="0" anchor="t" bIns="91425" lIns="91425" spcFirstLastPara="1" rIns="91425" wrap="square" tIns="91425">
+            <a:noAutofit/>
+          </a:bodyPr>
+          <a:lstStyle/>
+          <a:p>
+            <a:pPr indent="0" lvl="0" marL="0" rtl="0" algn="l">
+              <a:spcBef>
+                <a:spcPts val="0"/>
+              </a:spcBef>
+              <a:spcAft>
+                <a:spcPts val="0"/>
+              </a:spcAft>
+              <a:buNone/>
+            </a:pPr>
+            <a:r>
+              <a:t/>
+            </a:r>
+            <a:endParaRPr/>
+          </a:p>
+        </p:txBody>
+      </p:sp>
+    </p:spTree>
+  </p:cSld>
+  <p:clrMapOvr>
+    <a:masterClrMapping/>
+  </p:clrMapOvr>
+</p:notes>
+</file>
+
+<file path=ppt/notesSlides/notesSlide6.xml><?xml version="1.0" encoding="utf-8"?>
+<p:notes xmlns:a="http://schemas.openxmlformats.org/drawingml/2006/main" xmlns:r="http://schemas.openxmlformats.org/officeDocument/2006/relationships" xmlns:mc="http://schemas.openxmlformats.org/markup-compatibility/2006" xmlns:mv="urn:schemas-microsoft-com:mac:vml" xmlns:p="http://schemas.openxmlformats.org/presentationml/2006/main" xmlns:c="http://schemas.openxmlformats.org/drawingml/2006/chart" xmlns:dgm="http://schemas.openxmlformats.org/drawingml/2006/diagram" xmlns:o="urn:schemas-microsoft-com:office:office" xmlns:v="urn:schemas-microsoft-com:vml" xmlns:pvml="urn:schemas-microsoft-com:office:powerpoint" xmlns:com="http://schemas.openxmlformats.org/drawingml/2006/compatibility" xmlns:p14="http://schemas.microsoft.com/office/powerpoint/2010/main" xmlns:p15="http://schemas.microsoft.com/office/powerpoint/2012/main" xmlns:ahyp="http://schemas.microsoft.com/office/drawing/2018/hyperlinkcolor" showMasterPhAnim="0" showMasterSp="0">
+  <p:cSld>
+    <p:spTree>
+      <p:nvGrpSpPr>
+        <p:cNvPr id="139" name="Shape 139"/>
+        <p:cNvGrpSpPr/>
+        <p:nvPr/>
+      </p:nvGrpSpPr>
+      <p:grpSpPr>
+        <a:xfrm>
+          <a:off x="0" y="0"/>
+          <a:ext cx="0" cy="0"/>
+          <a:chOff x="0" y="0"/>
+          <a:chExt cx="0" cy="0"/>
+        </a:xfrm>
+      </p:grpSpPr>
+      <p:sp>
+        <p:nvSpPr>
+          <p:cNvPr id="140" name="Google Shape;140;h3c2ed2f615f9a20e_0_161:notes"/>
+          <p:cNvSpPr/>
+          <p:nvPr>
+            <p:ph idx="2" type="sldImg"/>
+          </p:nvPr>
+        </p:nvSpPr>
+        <p:spPr>
+          <a:xfrm>
+            <a:off x="381300" y="685800"/>
+            <a:ext cx="6096000" cy="3429000"/>
+          </a:xfrm>
+          <a:custGeom>
+            <a:rect b="b" l="l" r="r" t="t"/>
+            <a:pathLst>
+              <a:path extrusionOk="0" h="120000" w="120000">
+                <a:moveTo>
+                  <a:pt x="0" y="0"/>
+                </a:moveTo>
+                <a:lnTo>
+                  <a:pt x="120000" y="0"/>
+                </a:lnTo>
+                <a:lnTo>
+                  <a:pt x="120000" y="120000"/>
+                </a:lnTo>
+                <a:lnTo>
+                  <a:pt x="0" y="120000"/>
+                </a:lnTo>
+                <a:close/>
+              </a:path>
+            </a:pathLst>
+          </a:custGeom>
+        </p:spPr>
+      </p:sp>
+      <p:sp>
+        <p:nvSpPr>
+          <p:cNvPr id="141" name="Google Shape;141;h3c2ed2f615f9a20e_0_161:notes"/>
+          <p:cNvSpPr txBox="1"/>
+          <p:nvPr>
+            <p:ph idx="1" type="body"/>
+          </p:nvPr>
+        </p:nvSpPr>
+        <p:spPr>
+          <a:xfrm>
+            <a:off x="685800" y="4343400"/>
+            <a:ext cx="5486400" cy="4114800"/>
+          </a:xfrm>
+          <a:prstGeom prst="rect">
+            <a:avLst/>
+          </a:prstGeom>
+        </p:spPr>
+        <p:txBody>
+          <a:bodyPr anchorCtr="0" anchor="t" bIns="91425" lIns="91425" spcFirstLastPara="1" rIns="91425" wrap="square" tIns="91425">
+            <a:noAutofit/>
+          </a:bodyPr>
+          <a:lstStyle/>
+          <a:p>
+            <a:pPr indent="0" lvl="0" marL="0" rtl="0" algn="l">
+              <a:spcBef>
+                <a:spcPts val="0"/>
+              </a:spcBef>
+              <a:spcAft>
+                <a:spcPts val="0"/>
+              </a:spcAft>
+              <a:buNone/>
+            </a:pPr>
+            <a:r>
+              <a:t/>
+            </a:r>
+            <a:endParaRPr/>
+          </a:p>
+        </p:txBody>
+      </p:sp>
+    </p:spTree>
+  </p:cSld>
+  <p:clrMapOvr>
+    <a:masterClrMapping/>
+  </p:clrMapOvr>
+</p:notes>
+</file>
+
+<file path=ppt/notesSlides/notesSlide7.xml><?xml version="1.0" encoding="utf-8"?>
+<p:notes xmlns:a="http://schemas.openxmlformats.org/drawingml/2006/main" xmlns:r="http://schemas.openxmlformats.org/officeDocument/2006/relationships" xmlns:mc="http://schemas.openxmlformats.org/markup-compatibility/2006" xmlns:mv="urn:schemas-microsoft-com:mac:vml" xmlns:p="http://schemas.openxmlformats.org/presentationml/2006/main" xmlns:c="http://schemas.openxmlformats.org/drawingml/2006/chart" xmlns:dgm="http://schemas.openxmlformats.org/drawingml/2006/diagram" xmlns:o="urn:schemas-microsoft-com:office:office" xmlns:v="urn:schemas-microsoft-com:vml" xmlns:pvml="urn:schemas-microsoft-com:office:powerpoint" xmlns:com="http://schemas.openxmlformats.org/drawingml/2006/compatibility" xmlns:p14="http://schemas.microsoft.com/office/powerpoint/2010/main" xmlns:p15="http://schemas.microsoft.com/office/powerpoint/2012/main" xmlns:ahyp="http://schemas.microsoft.com/office/drawing/2018/hyperlinkcolor" showMasterPhAnim="0" showMasterSp="0">
+  <p:cSld>
+    <p:spTree>
+      <p:nvGrpSpPr>
+        <p:cNvPr id="154" name="Shape 154"/>
+        <p:cNvGrpSpPr/>
+        <p:nvPr/>
+      </p:nvGrpSpPr>
+      <p:grpSpPr>
+        <a:xfrm>
+          <a:off x="0" y="0"/>
+          <a:ext cx="0" cy="0"/>
+          <a:chOff x="0" y="0"/>
+          <a:chExt cx="0" cy="0"/>
+        </a:xfrm>
+      </p:grpSpPr>
+      <p:sp>
+        <p:nvSpPr>
+          <p:cNvPr id="155" name="Google Shape;155;h3c2ed2f615f9a20e_0_205:notes"/>
+          <p:cNvSpPr/>
+          <p:nvPr>
+            <p:ph idx="2" type="sldImg"/>
+          </p:nvPr>
+        </p:nvSpPr>
+        <p:spPr>
+          <a:xfrm>
+            <a:off x="381300" y="685800"/>
+            <a:ext cx="6096000" cy="3429000"/>
+          </a:xfrm>
+          <a:custGeom>
+            <a:rect b="b" l="l" r="r" t="t"/>
+            <a:pathLst>
+              <a:path extrusionOk="0" h="120000" w="120000">
+                <a:moveTo>
+                  <a:pt x="0" y="0"/>
+                </a:moveTo>
+                <a:lnTo>
+                  <a:pt x="120000" y="0"/>
+                </a:lnTo>
+                <a:lnTo>
+                  <a:pt x="120000" y="120000"/>
+                </a:lnTo>
+                <a:lnTo>
+                  <a:pt x="0" y="120000"/>
+                </a:lnTo>
+                <a:close/>
+              </a:path>
+            </a:pathLst>
+          </a:custGeom>
+        </p:spPr>
+      </p:sp>
+      <p:sp>
+        <p:nvSpPr>
+          <p:cNvPr id="156" name="Google Shape;156;h3c2ed2f615f9a20e_0_205:notes"/>
+          <p:cNvSpPr txBox="1"/>
+          <p:nvPr>
+            <p:ph idx="1" type="body"/>
+          </p:nvPr>
+        </p:nvSpPr>
+        <p:spPr>
+          <a:xfrm>
+            <a:off x="685800" y="4343400"/>
+            <a:ext cx="5486400" cy="4114800"/>
+          </a:xfrm>
+          <a:prstGeom prst="rect">
+            <a:avLst/>
+          </a:prstGeom>
+        </p:spPr>
+        <p:txBody>
+          <a:bodyPr anchorCtr="0" anchor="t" bIns="91425" lIns="91425" spcFirstLastPara="1" rIns="91425" wrap="square" tIns="91425">
+            <a:noAutofit/>
+          </a:bodyPr>
+          <a:lstStyle/>
+          <a:p>
+            <a:pPr indent="0" lvl="0" marL="0" rtl="0" algn="l">
+              <a:spcBef>
+                <a:spcPts val="0"/>
+              </a:spcBef>
+              <a:spcAft>
+                <a:spcPts val="0"/>
+              </a:spcAft>
+              <a:buNone/>
+            </a:pPr>
+            <a:r>
+              <a:t/>
+            </a:r>
+            <a:endParaRPr/>
+          </a:p>
+        </p:txBody>
+      </p:sp>
+    </p:spTree>
+  </p:cSld>
+  <p:clrMapOvr>
+    <a:masterClrMapping/>
+  </p:clrMapOvr>
+</p:notes>
+</file>
+
+<file path=ppt/notesSlides/notesSlide8.xml><?xml version="1.0" encoding="utf-8"?>
+<p:notes xmlns:a="http://schemas.openxmlformats.org/drawingml/2006/main" xmlns:r="http://schemas.openxmlformats.org/officeDocument/2006/relationships" xmlns:mc="http://schemas.openxmlformats.org/markup-compatibility/2006" xmlns:mv="urn:schemas-microsoft-com:mac:vml" xmlns:p="http://schemas.openxmlformats.org/presentationml/2006/main" xmlns:c="http://schemas.openxmlformats.org/drawingml/2006/chart" xmlns:dgm="http://schemas.openxmlformats.org/drawingml/2006/diagram" xmlns:o="urn:schemas-microsoft-com:office:office" xmlns:v="urn:schemas-microsoft-com:vml" xmlns:pvml="urn:schemas-microsoft-com:office:powerpoint" xmlns:com="http://schemas.openxmlformats.org/drawingml/2006/compatibility" xmlns:p14="http://schemas.microsoft.com/office/powerpoint/2010/main" xmlns:p15="http://schemas.microsoft.com/office/powerpoint/2012/main" xmlns:ahyp="http://schemas.microsoft.com/office/drawing/2018/hyperlinkcolor" showMasterPhAnim="0" showMasterSp="0">
+  <p:cSld>
+    <p:spTree>
+      <p:nvGrpSpPr>
+        <p:cNvPr id="173" name="Shape 173"/>
+        <p:cNvGrpSpPr/>
+        <p:nvPr/>
+      </p:nvGrpSpPr>
+      <p:grpSpPr>
+        <a:xfrm>
+          <a:off x="0" y="0"/>
+          <a:ext cx="0" cy="0"/>
+          <a:chOff x="0" y="0"/>
+          <a:chExt cx="0" cy="0"/>
+        </a:xfrm>
+      </p:grpSpPr>
+      <p:sp>
+        <p:nvSpPr>
+          <p:cNvPr id="174" name="Google Shape;174;h3c2ed2f615f9a20e_0_186:notes"/>
+          <p:cNvSpPr/>
+          <p:nvPr>
+            <p:ph idx="2" type="sldImg"/>
+          </p:nvPr>
+        </p:nvSpPr>
+        <p:spPr>
+          <a:xfrm>
+            <a:off x="381300" y="685800"/>
+            <a:ext cx="6096000" cy="3429000"/>
+          </a:xfrm>
+          <a:custGeom>
+            <a:rect b="b" l="l" r="r" t="t"/>
+            <a:pathLst>
+              <a:path extrusionOk="0" h="120000" w="120000">
+                <a:moveTo>
+                  <a:pt x="0" y="0"/>
+                </a:moveTo>
+                <a:lnTo>
+                  <a:pt x="120000" y="0"/>
+                </a:lnTo>
+                <a:lnTo>
+                  <a:pt x="120000" y="120000"/>
+                </a:lnTo>
+                <a:lnTo>
+                  <a:pt x="0" y="120000"/>
+                </a:lnTo>
+                <a:close/>
+              </a:path>
+            </a:pathLst>
+          </a:custGeom>
+        </p:spPr>
+      </p:sp>
+      <p:sp>
+        <p:nvSpPr>
+          <p:cNvPr id="175" name="Google Shape;175;h3c2ed2f615f9a20e_0_186:notes"/>
           <p:cNvSpPr txBox="1"/>
           <p:nvPr>
             <p:ph idx="1" type="body"/>
@@ -9081,6 +9381,1991 @@
 </p:sld>
 </file>
 
+<file path=ppt/slides/slide6.xml><?xml version="1.0" encoding="utf-8"?>
+<p:sld xmlns:a="http://schemas.openxmlformats.org/drawingml/2006/main" xmlns:r="http://schemas.openxmlformats.org/officeDocument/2006/relationships" xmlns:mc="http://schemas.openxmlformats.org/markup-compatibility/2006" xmlns:mv="urn:schemas-microsoft-com:mac:vml" xmlns:p="http://schemas.openxmlformats.org/presentationml/2006/main" xmlns:c="http://schemas.openxmlformats.org/drawingml/2006/chart" xmlns:dgm="http://schemas.openxmlformats.org/drawingml/2006/diagram" xmlns:o="urn:schemas-microsoft-com:office:office" xmlns:v="urn:schemas-microsoft-com:vml" xmlns:pvml="urn:schemas-microsoft-com:office:powerpoint" xmlns:com="http://schemas.openxmlformats.org/drawingml/2006/compatibility" xmlns:p14="http://schemas.microsoft.com/office/powerpoint/2010/main" xmlns:p15="http://schemas.microsoft.com/office/powerpoint/2012/main" xmlns:ahyp="http://schemas.microsoft.com/office/drawing/2018/hyperlinkcolor">
+  <p:cSld>
+    <p:spTree>
+      <p:nvGrpSpPr>
+        <p:cNvPr id="142" name="Shape 142"/>
+        <p:cNvGrpSpPr/>
+        <p:nvPr/>
+      </p:nvGrpSpPr>
+      <p:grpSpPr>
+        <a:xfrm>
+          <a:off x="0" y="0"/>
+          <a:ext cx="0" cy="0"/>
+          <a:chOff x="0" y="0"/>
+          <a:chExt cx="0" cy="0"/>
+        </a:xfrm>
+      </p:grpSpPr>
+      <p:sp>
+        <p:nvSpPr>
+          <p:cNvPr id="143" name="Google Shape;143;p18"/>
+          <p:cNvSpPr/>
+          <p:nvPr/>
+        </p:nvSpPr>
+        <p:spPr>
+          <a:xfrm flipH="1">
+            <a:off x="1510684" y="620082"/>
+            <a:ext cx="4498200" cy="4192800"/>
+          </a:xfrm>
+          <a:prstGeom prst="flowChartConnector">
+            <a:avLst/>
+          </a:prstGeom>
+          <a:noFill/>
+          <a:ln cap="flat" cmpd="sng" w="65075">
+            <a:solidFill>
+              <a:srgbClr val="F4CCCC"/>
+            </a:solidFill>
+            <a:prstDash val="solid"/>
+            <a:round/>
+            <a:headEnd len="sm" w="sm" type="none"/>
+            <a:tailEnd len="sm" w="sm" type="none"/>
+          </a:ln>
+        </p:spPr>
+        <p:txBody>
+          <a:bodyPr anchorCtr="0" anchor="ctr" bIns="78075" lIns="78075" spcFirstLastPara="1" rIns="78075" wrap="square" tIns="78075">
+            <a:noAutofit/>
+          </a:bodyPr>
+          <a:lstStyle/>
+          <a:p>
+            <a:pPr indent="0" lvl="0" marL="0" rtl="0" algn="ctr">
+              <a:spcBef>
+                <a:spcPts val="0"/>
+              </a:spcBef>
+              <a:spcAft>
+                <a:spcPts val="0"/>
+              </a:spcAft>
+              <a:buNone/>
+            </a:pPr>
+            <a:r>
+              <a:t/>
+            </a:r>
+            <a:endParaRPr sz="1196">
+              <a:solidFill>
+                <a:schemeClr val="accent1"/>
+              </a:solidFill>
+              <a:highlight>
+                <a:schemeClr val="lt1"/>
+              </a:highlight>
+            </a:endParaRPr>
+          </a:p>
+        </p:txBody>
+      </p:sp>
+      <p:sp>
+        <p:nvSpPr>
+          <p:cNvPr id="144" name="Google Shape;144;p18"/>
+          <p:cNvSpPr txBox="1"/>
+          <p:nvPr/>
+        </p:nvSpPr>
+        <p:spPr>
+          <a:xfrm>
+            <a:off x="2714426" y="620075"/>
+            <a:ext cx="2090700" cy="523200"/>
+          </a:xfrm>
+          <a:prstGeom prst="rect">
+            <a:avLst/>
+          </a:prstGeom>
+          <a:noFill/>
+          <a:ln>
+            <a:noFill/>
+          </a:ln>
+        </p:spPr>
+        <p:txBody>
+          <a:bodyPr anchorCtr="0" anchor="t" bIns="91425" lIns="91425" spcFirstLastPara="1" rIns="91425" wrap="square" tIns="91425">
+            <a:spAutoFit/>
+          </a:bodyPr>
+          <a:lstStyle/>
+          <a:p>
+            <a:pPr indent="0" lvl="0" marL="0" rtl="0" algn="l">
+              <a:spcBef>
+                <a:spcPts val="0"/>
+              </a:spcBef>
+              <a:spcAft>
+                <a:spcPts val="0"/>
+              </a:spcAft>
+              <a:buNone/>
+            </a:pPr>
+            <a:r>
+              <a:rPr b="1" lang="ja" sz="2200">
+                <a:solidFill>
+                  <a:schemeClr val="dk1"/>
+                </a:solidFill>
+              </a:rPr>
+              <a:t>2000年 </a:t>
+            </a:r>
+            <a:r>
+              <a:rPr b="1" lang="ja" sz="2200">
+                <a:solidFill>
+                  <a:schemeClr val="dk1"/>
+                </a:solidFill>
+              </a:rPr>
+              <a:t>1500</a:t>
+            </a:r>
+            <a:r>
+              <a:rPr b="1" lang="ja" sz="2200">
+                <a:solidFill>
+                  <a:schemeClr val="dk1"/>
+                </a:solidFill>
+              </a:rPr>
+              <a:t>年</a:t>
+            </a:r>
+            <a:endParaRPr b="1" sz="2200"/>
+          </a:p>
+        </p:txBody>
+      </p:sp>
+      <p:sp>
+        <p:nvSpPr>
+          <p:cNvPr id="145" name="Google Shape;145;p18"/>
+          <p:cNvSpPr/>
+          <p:nvPr/>
+        </p:nvSpPr>
+        <p:spPr>
+          <a:xfrm rot="-1960206">
+            <a:off x="2176412" y="908574"/>
+            <a:ext cx="444052" cy="335955"/>
+          </a:xfrm>
+          <a:prstGeom prst="notchedRightArrow">
+            <a:avLst>
+              <a:gd fmla="val 9770" name="adj1"/>
+              <a:gd fmla="val 71391" name="adj2"/>
+            </a:avLst>
+          </a:prstGeom>
+          <a:solidFill>
+            <a:srgbClr val="F4CCCC"/>
+          </a:solidFill>
+          <a:ln cap="flat" cmpd="sng" w="9525">
+            <a:solidFill>
+              <a:srgbClr val="F9CB9C"/>
+            </a:solidFill>
+            <a:prstDash val="solid"/>
+            <a:round/>
+            <a:headEnd len="sm" w="sm" type="none"/>
+            <a:tailEnd len="sm" w="sm" type="none"/>
+          </a:ln>
+        </p:spPr>
+        <p:txBody>
+          <a:bodyPr anchorCtr="0" anchor="ctr" bIns="91425" lIns="91425" spcFirstLastPara="1" rIns="91425" wrap="square" tIns="91425">
+            <a:noAutofit/>
+          </a:bodyPr>
+          <a:lstStyle/>
+          <a:p>
+            <a:pPr indent="0" lvl="0" marL="0" rtl="0" algn="ctr">
+              <a:spcBef>
+                <a:spcPts val="0"/>
+              </a:spcBef>
+              <a:spcAft>
+                <a:spcPts val="0"/>
+              </a:spcAft>
+              <a:buNone/>
+            </a:pPr>
+            <a:r>
+              <a:t/>
+            </a:r>
+            <a:endParaRPr/>
+          </a:p>
+        </p:txBody>
+      </p:sp>
+      <p:sp>
+        <p:nvSpPr>
+          <p:cNvPr id="146" name="Google Shape;146;p18"/>
+          <p:cNvSpPr/>
+          <p:nvPr/>
+        </p:nvSpPr>
+        <p:spPr>
+          <a:xfrm rot="-5400000">
+            <a:off x="1289245" y="2403740"/>
+            <a:ext cx="444000" cy="336000"/>
+          </a:xfrm>
+          <a:prstGeom prst="notchedRightArrow">
+            <a:avLst>
+              <a:gd fmla="val 9770" name="adj1"/>
+              <a:gd fmla="val 71391" name="adj2"/>
+            </a:avLst>
+          </a:prstGeom>
+          <a:solidFill>
+            <a:srgbClr val="F4CCCC"/>
+          </a:solidFill>
+          <a:ln cap="flat" cmpd="sng" w="9525">
+            <a:solidFill>
+              <a:srgbClr val="F9CB9C"/>
+            </a:solidFill>
+            <a:prstDash val="solid"/>
+            <a:round/>
+            <a:headEnd len="sm" w="sm" type="none"/>
+            <a:tailEnd len="sm" w="sm" type="none"/>
+          </a:ln>
+        </p:spPr>
+        <p:txBody>
+          <a:bodyPr anchorCtr="0" anchor="ctr" bIns="91425" lIns="91425" spcFirstLastPara="1" rIns="91425" wrap="square" tIns="91425">
+            <a:noAutofit/>
+          </a:bodyPr>
+          <a:lstStyle/>
+          <a:p>
+            <a:pPr indent="0" lvl="0" marL="0" rtl="0" algn="ctr">
+              <a:spcBef>
+                <a:spcPts val="0"/>
+              </a:spcBef>
+              <a:spcAft>
+                <a:spcPts val="0"/>
+              </a:spcAft>
+              <a:buNone/>
+            </a:pPr>
+            <a:r>
+              <a:t/>
+            </a:r>
+            <a:endParaRPr/>
+          </a:p>
+        </p:txBody>
+      </p:sp>
+      <p:sp>
+        <p:nvSpPr>
+          <p:cNvPr id="147" name="Google Shape;147;p18"/>
+          <p:cNvSpPr/>
+          <p:nvPr/>
+        </p:nvSpPr>
+        <p:spPr>
+          <a:xfrm rot="-8774089">
+            <a:off x="2312350" y="4311809"/>
+            <a:ext cx="444232" cy="336066"/>
+          </a:xfrm>
+          <a:prstGeom prst="notchedRightArrow">
+            <a:avLst>
+              <a:gd fmla="val 9770" name="adj1"/>
+              <a:gd fmla="val 71391" name="adj2"/>
+            </a:avLst>
+          </a:prstGeom>
+          <a:solidFill>
+            <a:srgbClr val="F4CCCC"/>
+          </a:solidFill>
+          <a:ln cap="flat" cmpd="sng" w="9525">
+            <a:solidFill>
+              <a:srgbClr val="F9CB9C"/>
+            </a:solidFill>
+            <a:prstDash val="solid"/>
+            <a:round/>
+            <a:headEnd len="sm" w="sm" type="none"/>
+            <a:tailEnd len="sm" w="sm" type="none"/>
+          </a:ln>
+        </p:spPr>
+        <p:txBody>
+          <a:bodyPr anchorCtr="0" anchor="ctr" bIns="91425" lIns="91425" spcFirstLastPara="1" rIns="91425" wrap="square" tIns="91425">
+            <a:noAutofit/>
+          </a:bodyPr>
+          <a:lstStyle/>
+          <a:p>
+            <a:pPr indent="0" lvl="0" marL="0" rtl="0" algn="ctr">
+              <a:spcBef>
+                <a:spcPts val="0"/>
+              </a:spcBef>
+              <a:spcAft>
+                <a:spcPts val="0"/>
+              </a:spcAft>
+              <a:buNone/>
+            </a:pPr>
+            <a:r>
+              <a:t/>
+            </a:r>
+            <a:endParaRPr/>
+          </a:p>
+        </p:txBody>
+      </p:sp>
+      <p:sp>
+        <p:nvSpPr>
+          <p:cNvPr id="148" name="Google Shape;148;p18"/>
+          <p:cNvSpPr/>
+          <p:nvPr/>
+        </p:nvSpPr>
+        <p:spPr>
+          <a:xfrm rot="7361461">
+            <a:off x="5515601" y="3508900"/>
+            <a:ext cx="443800" cy="336027"/>
+          </a:xfrm>
+          <a:prstGeom prst="notchedRightArrow">
+            <a:avLst>
+              <a:gd fmla="val 9770" name="adj1"/>
+              <a:gd fmla="val 71391" name="adj2"/>
+            </a:avLst>
+          </a:prstGeom>
+          <a:solidFill>
+            <a:srgbClr val="F4CCCC"/>
+          </a:solidFill>
+          <a:ln cap="flat" cmpd="sng" w="9525">
+            <a:solidFill>
+              <a:srgbClr val="F9CB9C"/>
+            </a:solidFill>
+            <a:prstDash val="solid"/>
+            <a:round/>
+            <a:headEnd len="sm" w="sm" type="none"/>
+            <a:tailEnd len="sm" w="sm" type="none"/>
+          </a:ln>
+        </p:spPr>
+        <p:txBody>
+          <a:bodyPr anchorCtr="0" anchor="ctr" bIns="91425" lIns="91425" spcFirstLastPara="1" rIns="91425" wrap="square" tIns="91425">
+            <a:noAutofit/>
+          </a:bodyPr>
+          <a:lstStyle/>
+          <a:p>
+            <a:pPr indent="0" lvl="0" marL="0" rtl="0" algn="ctr">
+              <a:spcBef>
+                <a:spcPts val="0"/>
+              </a:spcBef>
+              <a:spcAft>
+                <a:spcPts val="0"/>
+              </a:spcAft>
+              <a:buNone/>
+            </a:pPr>
+            <a:r>
+              <a:t/>
+            </a:r>
+            <a:endParaRPr/>
+          </a:p>
+        </p:txBody>
+      </p:sp>
+      <p:sp>
+        <p:nvSpPr>
+          <p:cNvPr id="149" name="Google Shape;149;p18"/>
+          <p:cNvSpPr/>
+          <p:nvPr/>
+        </p:nvSpPr>
+        <p:spPr>
+          <a:xfrm rot="3546158">
+            <a:off x="5337838" y="1367012"/>
+            <a:ext cx="444010" cy="336120"/>
+          </a:xfrm>
+          <a:prstGeom prst="notchedRightArrow">
+            <a:avLst>
+              <a:gd fmla="val 9770" name="adj1"/>
+              <a:gd fmla="val 71391" name="adj2"/>
+            </a:avLst>
+          </a:prstGeom>
+          <a:solidFill>
+            <a:srgbClr val="F4CCCC"/>
+          </a:solidFill>
+          <a:ln cap="flat" cmpd="sng" w="9525">
+            <a:solidFill>
+              <a:srgbClr val="F9CB9C"/>
+            </a:solidFill>
+            <a:prstDash val="solid"/>
+            <a:round/>
+            <a:headEnd len="sm" w="sm" type="none"/>
+            <a:tailEnd len="sm" w="sm" type="none"/>
+          </a:ln>
+        </p:spPr>
+        <p:txBody>
+          <a:bodyPr anchorCtr="0" anchor="ctr" bIns="91425" lIns="91425" spcFirstLastPara="1" rIns="91425" wrap="square" tIns="91425">
+            <a:noAutofit/>
+          </a:bodyPr>
+          <a:lstStyle/>
+          <a:p>
+            <a:pPr indent="0" lvl="0" marL="0" rtl="0" algn="ctr">
+              <a:spcBef>
+                <a:spcPts val="0"/>
+              </a:spcBef>
+              <a:spcAft>
+                <a:spcPts val="0"/>
+              </a:spcAft>
+              <a:buNone/>
+            </a:pPr>
+            <a:r>
+              <a:t/>
+            </a:r>
+            <a:endParaRPr/>
+          </a:p>
+        </p:txBody>
+      </p:sp>
+      <p:sp>
+        <p:nvSpPr>
+          <p:cNvPr id="150" name="Google Shape;150;p18"/>
+          <p:cNvSpPr txBox="1"/>
+          <p:nvPr/>
+        </p:nvSpPr>
+        <p:spPr>
+          <a:xfrm>
+            <a:off x="1555768" y="1895814"/>
+            <a:ext cx="1180800" cy="523200"/>
+          </a:xfrm>
+          <a:prstGeom prst="rect">
+            <a:avLst/>
+          </a:prstGeom>
+          <a:noFill/>
+          <a:ln>
+            <a:noFill/>
+          </a:ln>
+        </p:spPr>
+        <p:txBody>
+          <a:bodyPr anchorCtr="0" anchor="t" bIns="91425" lIns="91425" spcFirstLastPara="1" rIns="91425" wrap="square" tIns="91425">
+            <a:spAutoFit/>
+          </a:bodyPr>
+          <a:lstStyle/>
+          <a:p>
+            <a:pPr indent="0" lvl="0" marL="0" rtl="0" algn="l">
+              <a:spcBef>
+                <a:spcPts val="0"/>
+              </a:spcBef>
+              <a:spcAft>
+                <a:spcPts val="0"/>
+              </a:spcAft>
+              <a:buNone/>
+            </a:pPr>
+            <a:r>
+              <a:rPr b="1" lang="ja" sz="2200">
+                <a:solidFill>
+                  <a:schemeClr val="dk1"/>
+                </a:solidFill>
+              </a:rPr>
+              <a:t>1900年</a:t>
+            </a:r>
+            <a:endParaRPr b="1" sz="2200"/>
+          </a:p>
+        </p:txBody>
+      </p:sp>
+      <p:sp>
+        <p:nvSpPr>
+          <p:cNvPr id="151" name="Google Shape;151;p18"/>
+          <p:cNvSpPr txBox="1"/>
+          <p:nvPr/>
+        </p:nvSpPr>
+        <p:spPr>
+          <a:xfrm>
+            <a:off x="1988714" y="3810036"/>
+            <a:ext cx="1180800" cy="523200"/>
+          </a:xfrm>
+          <a:prstGeom prst="rect">
+            <a:avLst/>
+          </a:prstGeom>
+          <a:noFill/>
+          <a:ln>
+            <a:noFill/>
+          </a:ln>
+        </p:spPr>
+        <p:txBody>
+          <a:bodyPr anchorCtr="0" anchor="t" bIns="91425" lIns="91425" spcFirstLastPara="1" rIns="91425" wrap="square" tIns="91425">
+            <a:spAutoFit/>
+          </a:bodyPr>
+          <a:lstStyle/>
+          <a:p>
+            <a:pPr indent="0" lvl="0" marL="0" rtl="0" algn="l">
+              <a:spcBef>
+                <a:spcPts val="0"/>
+              </a:spcBef>
+              <a:spcAft>
+                <a:spcPts val="0"/>
+              </a:spcAft>
+              <a:buNone/>
+            </a:pPr>
+            <a:r>
+              <a:rPr b="1" lang="ja" sz="2200">
+                <a:solidFill>
+                  <a:schemeClr val="dk1"/>
+                </a:solidFill>
+              </a:rPr>
+              <a:t>1800年</a:t>
+            </a:r>
+            <a:endParaRPr b="1" sz="2200"/>
+          </a:p>
+        </p:txBody>
+      </p:sp>
+      <p:sp>
+        <p:nvSpPr>
+          <p:cNvPr id="152" name="Google Shape;152;p18"/>
+          <p:cNvSpPr txBox="1"/>
+          <p:nvPr/>
+        </p:nvSpPr>
+        <p:spPr>
+          <a:xfrm>
+            <a:off x="4571993" y="3810021"/>
+            <a:ext cx="1180800" cy="523200"/>
+          </a:xfrm>
+          <a:prstGeom prst="rect">
+            <a:avLst/>
+          </a:prstGeom>
+          <a:noFill/>
+          <a:ln>
+            <a:noFill/>
+          </a:ln>
+        </p:spPr>
+        <p:txBody>
+          <a:bodyPr anchorCtr="0" anchor="t" bIns="91425" lIns="91425" spcFirstLastPara="1" rIns="91425" wrap="square" tIns="91425">
+            <a:spAutoFit/>
+          </a:bodyPr>
+          <a:lstStyle/>
+          <a:p>
+            <a:pPr indent="0" lvl="0" marL="0" rtl="0" algn="l">
+              <a:spcBef>
+                <a:spcPts val="0"/>
+              </a:spcBef>
+              <a:spcAft>
+                <a:spcPts val="0"/>
+              </a:spcAft>
+              <a:buNone/>
+            </a:pPr>
+            <a:r>
+              <a:rPr b="1" lang="ja" sz="2200">
+                <a:solidFill>
+                  <a:schemeClr val="dk1"/>
+                </a:solidFill>
+              </a:rPr>
+              <a:t>1700年</a:t>
+            </a:r>
+            <a:endParaRPr b="1" sz="2200"/>
+          </a:p>
+        </p:txBody>
+      </p:sp>
+      <p:sp>
+        <p:nvSpPr>
+          <p:cNvPr id="153" name="Google Shape;153;p18"/>
+          <p:cNvSpPr txBox="1"/>
+          <p:nvPr/>
+        </p:nvSpPr>
+        <p:spPr>
+          <a:xfrm>
+            <a:off x="4969600" y="1889564"/>
+            <a:ext cx="1180800" cy="523200"/>
+          </a:xfrm>
+          <a:prstGeom prst="rect">
+            <a:avLst/>
+          </a:prstGeom>
+          <a:noFill/>
+          <a:ln>
+            <a:noFill/>
+          </a:ln>
+        </p:spPr>
+        <p:txBody>
+          <a:bodyPr anchorCtr="0" anchor="t" bIns="91425" lIns="91425" spcFirstLastPara="1" rIns="91425" wrap="square" tIns="91425">
+            <a:spAutoFit/>
+          </a:bodyPr>
+          <a:lstStyle/>
+          <a:p>
+            <a:pPr indent="0" lvl="0" marL="0" rtl="0" algn="l">
+              <a:spcBef>
+                <a:spcPts val="0"/>
+              </a:spcBef>
+              <a:spcAft>
+                <a:spcPts val="0"/>
+              </a:spcAft>
+              <a:buNone/>
+            </a:pPr>
+            <a:r>
+              <a:rPr b="1" lang="ja" sz="2200">
+                <a:solidFill>
+                  <a:schemeClr val="dk1"/>
+                </a:solidFill>
+              </a:rPr>
+              <a:t>1600年</a:t>
+            </a:r>
+            <a:endParaRPr b="1" sz="2200"/>
+          </a:p>
+        </p:txBody>
+      </p:sp>
+    </p:spTree>
+  </p:cSld>
+  <p:clrMapOvr>
+    <a:masterClrMapping/>
+  </p:clrMapOvr>
+</p:sld>
+</file>
+
+<file path=ppt/slides/slide7.xml><?xml version="1.0" encoding="utf-8"?>
+<p:sld xmlns:a="http://schemas.openxmlformats.org/drawingml/2006/main" xmlns:r="http://schemas.openxmlformats.org/officeDocument/2006/relationships" xmlns:mc="http://schemas.openxmlformats.org/markup-compatibility/2006" xmlns:mv="urn:schemas-microsoft-com:mac:vml" xmlns:p="http://schemas.openxmlformats.org/presentationml/2006/main" xmlns:c="http://schemas.openxmlformats.org/drawingml/2006/chart" xmlns:dgm="http://schemas.openxmlformats.org/drawingml/2006/diagram" xmlns:o="urn:schemas-microsoft-com:office:office" xmlns:v="urn:schemas-microsoft-com:vml" xmlns:pvml="urn:schemas-microsoft-com:office:powerpoint" xmlns:com="http://schemas.openxmlformats.org/drawingml/2006/compatibility" xmlns:p14="http://schemas.microsoft.com/office/powerpoint/2010/main" xmlns:p15="http://schemas.microsoft.com/office/powerpoint/2012/main" xmlns:ahyp="http://schemas.microsoft.com/office/drawing/2018/hyperlinkcolor">
+  <p:cSld>
+    <p:spTree>
+      <p:nvGrpSpPr>
+        <p:cNvPr id="157" name="Shape 157"/>
+        <p:cNvGrpSpPr/>
+        <p:nvPr/>
+      </p:nvGrpSpPr>
+      <p:grpSpPr>
+        <a:xfrm>
+          <a:off x="0" y="0"/>
+          <a:ext cx="0" cy="0"/>
+          <a:chOff x="0" y="0"/>
+          <a:chExt cx="0" cy="0"/>
+        </a:xfrm>
+      </p:grpSpPr>
+      <p:sp>
+        <p:nvSpPr>
+          <p:cNvPr id="158" name="Google Shape;158;p19"/>
+          <p:cNvSpPr/>
+          <p:nvPr/>
+        </p:nvSpPr>
+        <p:spPr>
+          <a:xfrm flipH="1">
+            <a:off x="1510684" y="620082"/>
+            <a:ext cx="4498200" cy="4192800"/>
+          </a:xfrm>
+          <a:prstGeom prst="flowChartConnector">
+            <a:avLst/>
+          </a:prstGeom>
+          <a:noFill/>
+          <a:ln cap="flat" cmpd="sng" w="65075">
+            <a:solidFill>
+              <a:srgbClr val="F4CCCC"/>
+            </a:solidFill>
+            <a:prstDash val="solid"/>
+            <a:round/>
+            <a:headEnd len="sm" w="sm" type="none"/>
+            <a:tailEnd len="sm" w="sm" type="none"/>
+          </a:ln>
+        </p:spPr>
+        <p:txBody>
+          <a:bodyPr anchorCtr="0" anchor="ctr" bIns="78075" lIns="78075" spcFirstLastPara="1" rIns="78075" wrap="square" tIns="78075">
+            <a:noAutofit/>
+          </a:bodyPr>
+          <a:lstStyle/>
+          <a:p>
+            <a:pPr indent="0" lvl="0" marL="0" rtl="0" algn="ctr">
+              <a:spcBef>
+                <a:spcPts val="0"/>
+              </a:spcBef>
+              <a:spcAft>
+                <a:spcPts val="0"/>
+              </a:spcAft>
+              <a:buNone/>
+            </a:pPr>
+            <a:r>
+              <a:t/>
+            </a:r>
+            <a:endParaRPr sz="1196">
+              <a:solidFill>
+                <a:schemeClr val="accent1"/>
+              </a:solidFill>
+              <a:highlight>
+                <a:schemeClr val="lt1"/>
+              </a:highlight>
+            </a:endParaRPr>
+          </a:p>
+        </p:txBody>
+      </p:sp>
+      <p:sp>
+        <p:nvSpPr>
+          <p:cNvPr id="159" name="Google Shape;159;p19"/>
+          <p:cNvSpPr/>
+          <p:nvPr/>
+        </p:nvSpPr>
+        <p:spPr>
+          <a:xfrm rot="-1960206">
+            <a:off x="2176412" y="908574"/>
+            <a:ext cx="444052" cy="335955"/>
+          </a:xfrm>
+          <a:prstGeom prst="notchedRightArrow">
+            <a:avLst>
+              <a:gd fmla="val 9770" name="adj1"/>
+              <a:gd fmla="val 71391" name="adj2"/>
+            </a:avLst>
+          </a:prstGeom>
+          <a:solidFill>
+            <a:srgbClr val="F4CCCC"/>
+          </a:solidFill>
+          <a:ln cap="flat" cmpd="sng" w="9525">
+            <a:solidFill>
+              <a:srgbClr val="F9CB9C"/>
+            </a:solidFill>
+            <a:prstDash val="solid"/>
+            <a:round/>
+            <a:headEnd len="sm" w="sm" type="none"/>
+            <a:tailEnd len="sm" w="sm" type="none"/>
+          </a:ln>
+        </p:spPr>
+        <p:txBody>
+          <a:bodyPr anchorCtr="0" anchor="ctr" bIns="91425" lIns="91425" spcFirstLastPara="1" rIns="91425" wrap="square" tIns="91425">
+            <a:noAutofit/>
+          </a:bodyPr>
+          <a:lstStyle/>
+          <a:p>
+            <a:pPr indent="0" lvl="0" marL="0" rtl="0" algn="ctr">
+              <a:spcBef>
+                <a:spcPts val="0"/>
+              </a:spcBef>
+              <a:spcAft>
+                <a:spcPts val="0"/>
+              </a:spcAft>
+              <a:buNone/>
+            </a:pPr>
+            <a:r>
+              <a:t/>
+            </a:r>
+            <a:endParaRPr/>
+          </a:p>
+        </p:txBody>
+      </p:sp>
+      <p:sp>
+        <p:nvSpPr>
+          <p:cNvPr id="160" name="Google Shape;160;p19"/>
+          <p:cNvSpPr/>
+          <p:nvPr/>
+        </p:nvSpPr>
+        <p:spPr>
+          <a:xfrm rot="-5400000">
+            <a:off x="1289245" y="2403740"/>
+            <a:ext cx="444000" cy="336000"/>
+          </a:xfrm>
+          <a:prstGeom prst="notchedRightArrow">
+            <a:avLst>
+              <a:gd fmla="val 9770" name="adj1"/>
+              <a:gd fmla="val 71391" name="adj2"/>
+            </a:avLst>
+          </a:prstGeom>
+          <a:solidFill>
+            <a:srgbClr val="F4CCCC"/>
+          </a:solidFill>
+          <a:ln cap="flat" cmpd="sng" w="9525">
+            <a:solidFill>
+              <a:srgbClr val="F9CB9C"/>
+            </a:solidFill>
+            <a:prstDash val="solid"/>
+            <a:round/>
+            <a:headEnd len="sm" w="sm" type="none"/>
+            <a:tailEnd len="sm" w="sm" type="none"/>
+          </a:ln>
+        </p:spPr>
+        <p:txBody>
+          <a:bodyPr anchorCtr="0" anchor="ctr" bIns="91425" lIns="91425" spcFirstLastPara="1" rIns="91425" wrap="square" tIns="91425">
+            <a:noAutofit/>
+          </a:bodyPr>
+          <a:lstStyle/>
+          <a:p>
+            <a:pPr indent="0" lvl="0" marL="0" rtl="0" algn="ctr">
+              <a:spcBef>
+                <a:spcPts val="0"/>
+              </a:spcBef>
+              <a:spcAft>
+                <a:spcPts val="0"/>
+              </a:spcAft>
+              <a:buNone/>
+            </a:pPr>
+            <a:r>
+              <a:t/>
+            </a:r>
+            <a:endParaRPr/>
+          </a:p>
+        </p:txBody>
+      </p:sp>
+      <p:sp>
+        <p:nvSpPr>
+          <p:cNvPr id="161" name="Google Shape;161;p19"/>
+          <p:cNvSpPr/>
+          <p:nvPr/>
+        </p:nvSpPr>
+        <p:spPr>
+          <a:xfrm rot="-8774089">
+            <a:off x="2312350" y="4311809"/>
+            <a:ext cx="444232" cy="336066"/>
+          </a:xfrm>
+          <a:prstGeom prst="notchedRightArrow">
+            <a:avLst>
+              <a:gd fmla="val 9770" name="adj1"/>
+              <a:gd fmla="val 71391" name="adj2"/>
+            </a:avLst>
+          </a:prstGeom>
+          <a:solidFill>
+            <a:srgbClr val="F4CCCC"/>
+          </a:solidFill>
+          <a:ln cap="flat" cmpd="sng" w="9525">
+            <a:solidFill>
+              <a:srgbClr val="F9CB9C"/>
+            </a:solidFill>
+            <a:prstDash val="solid"/>
+            <a:round/>
+            <a:headEnd len="sm" w="sm" type="none"/>
+            <a:tailEnd len="sm" w="sm" type="none"/>
+          </a:ln>
+        </p:spPr>
+        <p:txBody>
+          <a:bodyPr anchorCtr="0" anchor="ctr" bIns="91425" lIns="91425" spcFirstLastPara="1" rIns="91425" wrap="square" tIns="91425">
+            <a:noAutofit/>
+          </a:bodyPr>
+          <a:lstStyle/>
+          <a:p>
+            <a:pPr indent="0" lvl="0" marL="0" rtl="0" algn="ctr">
+              <a:spcBef>
+                <a:spcPts val="0"/>
+              </a:spcBef>
+              <a:spcAft>
+                <a:spcPts val="0"/>
+              </a:spcAft>
+              <a:buNone/>
+            </a:pPr>
+            <a:r>
+              <a:t/>
+            </a:r>
+            <a:endParaRPr/>
+          </a:p>
+        </p:txBody>
+      </p:sp>
+      <p:sp>
+        <p:nvSpPr>
+          <p:cNvPr id="162" name="Google Shape;162;p19"/>
+          <p:cNvSpPr/>
+          <p:nvPr/>
+        </p:nvSpPr>
+        <p:spPr>
+          <a:xfrm rot="7361461">
+            <a:off x="5515601" y="3508900"/>
+            <a:ext cx="443800" cy="336027"/>
+          </a:xfrm>
+          <a:prstGeom prst="notchedRightArrow">
+            <a:avLst>
+              <a:gd fmla="val 9770" name="adj1"/>
+              <a:gd fmla="val 71391" name="adj2"/>
+            </a:avLst>
+          </a:prstGeom>
+          <a:solidFill>
+            <a:srgbClr val="F4CCCC"/>
+          </a:solidFill>
+          <a:ln cap="flat" cmpd="sng" w="9525">
+            <a:solidFill>
+              <a:srgbClr val="F9CB9C"/>
+            </a:solidFill>
+            <a:prstDash val="solid"/>
+            <a:round/>
+            <a:headEnd len="sm" w="sm" type="none"/>
+            <a:tailEnd len="sm" w="sm" type="none"/>
+          </a:ln>
+        </p:spPr>
+        <p:txBody>
+          <a:bodyPr anchorCtr="0" anchor="ctr" bIns="91425" lIns="91425" spcFirstLastPara="1" rIns="91425" wrap="square" tIns="91425">
+            <a:noAutofit/>
+          </a:bodyPr>
+          <a:lstStyle/>
+          <a:p>
+            <a:pPr indent="0" lvl="0" marL="0" rtl="0" algn="ctr">
+              <a:spcBef>
+                <a:spcPts val="0"/>
+              </a:spcBef>
+              <a:spcAft>
+                <a:spcPts val="0"/>
+              </a:spcAft>
+              <a:buNone/>
+            </a:pPr>
+            <a:r>
+              <a:t/>
+            </a:r>
+            <a:endParaRPr/>
+          </a:p>
+        </p:txBody>
+      </p:sp>
+      <p:sp>
+        <p:nvSpPr>
+          <p:cNvPr id="163" name="Google Shape;163;p19"/>
+          <p:cNvSpPr/>
+          <p:nvPr/>
+        </p:nvSpPr>
+        <p:spPr>
+          <a:xfrm rot="3546158">
+            <a:off x="5337838" y="1367012"/>
+            <a:ext cx="444010" cy="336120"/>
+          </a:xfrm>
+          <a:prstGeom prst="notchedRightArrow">
+            <a:avLst>
+              <a:gd fmla="val 9770" name="adj1"/>
+              <a:gd fmla="val 71391" name="adj2"/>
+            </a:avLst>
+          </a:prstGeom>
+          <a:solidFill>
+            <a:srgbClr val="F4CCCC"/>
+          </a:solidFill>
+          <a:ln cap="flat" cmpd="sng" w="9525">
+            <a:solidFill>
+              <a:srgbClr val="F9CB9C"/>
+            </a:solidFill>
+            <a:prstDash val="solid"/>
+            <a:round/>
+            <a:headEnd len="sm" w="sm" type="none"/>
+            <a:tailEnd len="sm" w="sm" type="none"/>
+          </a:ln>
+        </p:spPr>
+        <p:txBody>
+          <a:bodyPr anchorCtr="0" anchor="ctr" bIns="91425" lIns="91425" spcFirstLastPara="1" rIns="91425" wrap="square" tIns="91425">
+            <a:noAutofit/>
+          </a:bodyPr>
+          <a:lstStyle/>
+          <a:p>
+            <a:pPr indent="0" lvl="0" marL="0" rtl="0" algn="ctr">
+              <a:spcBef>
+                <a:spcPts val="0"/>
+              </a:spcBef>
+              <a:spcAft>
+                <a:spcPts val="0"/>
+              </a:spcAft>
+              <a:buNone/>
+            </a:pPr>
+            <a:r>
+              <a:t/>
+            </a:r>
+            <a:endParaRPr/>
+          </a:p>
+        </p:txBody>
+      </p:sp>
+      <p:sp>
+        <p:nvSpPr>
+          <p:cNvPr id="164" name="Google Shape;164;p19"/>
+          <p:cNvSpPr txBox="1"/>
+          <p:nvPr/>
+        </p:nvSpPr>
+        <p:spPr>
+          <a:xfrm>
+            <a:off x="1555768" y="1895814"/>
+            <a:ext cx="1180800" cy="523200"/>
+          </a:xfrm>
+          <a:prstGeom prst="rect">
+            <a:avLst/>
+          </a:prstGeom>
+          <a:noFill/>
+          <a:ln>
+            <a:noFill/>
+          </a:ln>
+        </p:spPr>
+        <p:txBody>
+          <a:bodyPr anchorCtr="0" anchor="t" bIns="91425" lIns="91425" spcFirstLastPara="1" rIns="91425" wrap="square" tIns="91425">
+            <a:spAutoFit/>
+          </a:bodyPr>
+          <a:lstStyle/>
+          <a:p>
+            <a:pPr indent="0" lvl="0" marL="0" rtl="0" algn="l">
+              <a:spcBef>
+                <a:spcPts val="0"/>
+              </a:spcBef>
+              <a:spcAft>
+                <a:spcPts val="0"/>
+              </a:spcAft>
+              <a:buNone/>
+            </a:pPr>
+            <a:r>
+              <a:rPr b="1" lang="ja" sz="2200">
+                <a:solidFill>
+                  <a:schemeClr val="dk1"/>
+                </a:solidFill>
+              </a:rPr>
+              <a:t>1900年</a:t>
+            </a:r>
+            <a:endParaRPr b="1" sz="2200"/>
+          </a:p>
+        </p:txBody>
+      </p:sp>
+      <p:sp>
+        <p:nvSpPr>
+          <p:cNvPr id="165" name="Google Shape;165;p19"/>
+          <p:cNvSpPr txBox="1"/>
+          <p:nvPr/>
+        </p:nvSpPr>
+        <p:spPr>
+          <a:xfrm>
+            <a:off x="1988714" y="3810036"/>
+            <a:ext cx="1180800" cy="523200"/>
+          </a:xfrm>
+          <a:prstGeom prst="rect">
+            <a:avLst/>
+          </a:prstGeom>
+          <a:noFill/>
+          <a:ln>
+            <a:noFill/>
+          </a:ln>
+        </p:spPr>
+        <p:txBody>
+          <a:bodyPr anchorCtr="0" anchor="t" bIns="91425" lIns="91425" spcFirstLastPara="1" rIns="91425" wrap="square" tIns="91425">
+            <a:spAutoFit/>
+          </a:bodyPr>
+          <a:lstStyle/>
+          <a:p>
+            <a:pPr indent="0" lvl="0" marL="0" rtl="0" algn="l">
+              <a:spcBef>
+                <a:spcPts val="0"/>
+              </a:spcBef>
+              <a:spcAft>
+                <a:spcPts val="0"/>
+              </a:spcAft>
+              <a:buNone/>
+            </a:pPr>
+            <a:r>
+              <a:rPr b="1" lang="ja" sz="2200">
+                <a:solidFill>
+                  <a:schemeClr val="dk1"/>
+                </a:solidFill>
+              </a:rPr>
+              <a:t>1800年</a:t>
+            </a:r>
+            <a:endParaRPr b="1" sz="2200"/>
+          </a:p>
+        </p:txBody>
+      </p:sp>
+      <p:sp>
+        <p:nvSpPr>
+          <p:cNvPr id="166" name="Google Shape;166;p19"/>
+          <p:cNvSpPr txBox="1"/>
+          <p:nvPr/>
+        </p:nvSpPr>
+        <p:spPr>
+          <a:xfrm>
+            <a:off x="4571993" y="3810021"/>
+            <a:ext cx="1180800" cy="523200"/>
+          </a:xfrm>
+          <a:prstGeom prst="rect">
+            <a:avLst/>
+          </a:prstGeom>
+          <a:noFill/>
+          <a:ln>
+            <a:noFill/>
+          </a:ln>
+        </p:spPr>
+        <p:txBody>
+          <a:bodyPr anchorCtr="0" anchor="t" bIns="91425" lIns="91425" spcFirstLastPara="1" rIns="91425" wrap="square" tIns="91425">
+            <a:spAutoFit/>
+          </a:bodyPr>
+          <a:lstStyle/>
+          <a:p>
+            <a:pPr indent="0" lvl="0" marL="0" rtl="0" algn="l">
+              <a:spcBef>
+                <a:spcPts val="0"/>
+              </a:spcBef>
+              <a:spcAft>
+                <a:spcPts val="0"/>
+              </a:spcAft>
+              <a:buNone/>
+            </a:pPr>
+            <a:r>
+              <a:rPr b="1" lang="ja" sz="2200">
+                <a:solidFill>
+                  <a:schemeClr val="dk1"/>
+                </a:solidFill>
+              </a:rPr>
+              <a:t>1700年</a:t>
+            </a:r>
+            <a:endParaRPr b="1" sz="2200"/>
+          </a:p>
+        </p:txBody>
+      </p:sp>
+      <p:sp>
+        <p:nvSpPr>
+          <p:cNvPr id="167" name="Google Shape;167;p19"/>
+          <p:cNvSpPr txBox="1"/>
+          <p:nvPr/>
+        </p:nvSpPr>
+        <p:spPr>
+          <a:xfrm>
+            <a:off x="4969600" y="1889564"/>
+            <a:ext cx="1180800" cy="523200"/>
+          </a:xfrm>
+          <a:prstGeom prst="rect">
+            <a:avLst/>
+          </a:prstGeom>
+          <a:noFill/>
+          <a:ln>
+            <a:noFill/>
+          </a:ln>
+        </p:spPr>
+        <p:txBody>
+          <a:bodyPr anchorCtr="0" anchor="t" bIns="91425" lIns="91425" spcFirstLastPara="1" rIns="91425" wrap="square" tIns="91425">
+            <a:spAutoFit/>
+          </a:bodyPr>
+          <a:lstStyle/>
+          <a:p>
+            <a:pPr indent="0" lvl="0" marL="0" rtl="0" algn="l">
+              <a:spcBef>
+                <a:spcPts val="0"/>
+              </a:spcBef>
+              <a:spcAft>
+                <a:spcPts val="0"/>
+              </a:spcAft>
+              <a:buNone/>
+            </a:pPr>
+            <a:r>
+              <a:rPr b="1" lang="ja" sz="2200">
+                <a:solidFill>
+                  <a:schemeClr val="dk1"/>
+                </a:solidFill>
+              </a:rPr>
+              <a:t>1600年</a:t>
+            </a:r>
+            <a:endParaRPr b="1" sz="2200"/>
+          </a:p>
+        </p:txBody>
+      </p:sp>
+      <p:pic>
+        <p:nvPicPr>
+          <p:cNvPr id="168" name="Google Shape;168;p19" title="マゼラン.png"/>
+          <p:cNvPicPr preferRelativeResize="0"/>
+          <p:nvPr/>
+        </p:nvPicPr>
+        <p:blipFill>
+          <a:blip r:embed="rId3">
+            <a:alphaModFix/>
+          </a:blip>
+          <a:stretch>
+            <a:fillRect/>
+          </a:stretch>
+        </p:blipFill>
+        <p:spPr>
+          <a:xfrm>
+            <a:off x="4200325" y="1154475"/>
+            <a:ext cx="743350" cy="811450"/>
+          </a:xfrm>
+          <a:prstGeom prst="rect">
+            <a:avLst/>
+          </a:prstGeom>
+          <a:noFill/>
+          <a:ln>
+            <a:noFill/>
+          </a:ln>
+        </p:spPr>
+      </p:pic>
+      <p:pic>
+        <p:nvPicPr>
+          <p:cNvPr id="169" name="Google Shape;169;p19" title="Isaac_Newtonlis.jpg"/>
+          <p:cNvPicPr preferRelativeResize="0"/>
+          <p:nvPr/>
+        </p:nvPicPr>
+        <p:blipFill rotWithShape="1">
+          <a:blip r:embed="rId4">
+            <a:alphaModFix/>
+          </a:blip>
+          <a:srcRect b="53655" l="24529" r="24863" t="4672"/>
+          <a:stretch/>
+        </p:blipFill>
+        <p:spPr>
+          <a:xfrm>
+            <a:off x="4636800" y="2793738"/>
+            <a:ext cx="848701" cy="855795"/>
+          </a:xfrm>
+          <a:prstGeom prst="rect">
+            <a:avLst/>
+          </a:prstGeom>
+          <a:noFill/>
+          <a:ln>
+            <a:noFill/>
+          </a:ln>
+          <a:effectLst>
+            <a:outerShdw blurRad="57150" rotWithShape="0" algn="bl" dir="5400000" dist="19050">
+              <a:srgbClr val="000000">
+                <a:alpha val="50000"/>
+              </a:srgbClr>
+            </a:outerShdw>
+          </a:effectLst>
+        </p:spPr>
+      </p:pic>
+      <p:pic>
+        <p:nvPicPr>
+          <p:cNvPr id="170" name="Google Shape;170;p19" title="florence-nightingale.jpg"/>
+          <p:cNvPicPr preferRelativeResize="0"/>
+          <p:nvPr/>
+        </p:nvPicPr>
+        <p:blipFill>
+          <a:blip r:embed="rId5">
+            <a:alphaModFix/>
+          </a:blip>
+          <a:stretch>
+            <a:fillRect/>
+          </a:stretch>
+        </p:blipFill>
+        <p:spPr>
+          <a:xfrm>
+            <a:off x="2207450" y="2865541"/>
+            <a:ext cx="743350" cy="904700"/>
+          </a:xfrm>
+          <a:prstGeom prst="rect">
+            <a:avLst/>
+          </a:prstGeom>
+          <a:noFill/>
+          <a:ln>
+            <a:noFill/>
+          </a:ln>
+        </p:spPr>
+      </p:pic>
+      <p:pic>
+        <p:nvPicPr>
+          <p:cNvPr id="171" name="Google Shape;171;p19" title="neil-armstrong.jpg"/>
+          <p:cNvPicPr preferRelativeResize="0"/>
+          <p:nvPr/>
+        </p:nvPicPr>
+        <p:blipFill rotWithShape="1">
+          <a:blip r:embed="rId6">
+            <a:alphaModFix/>
+          </a:blip>
+          <a:srcRect b="0" l="0" r="2931" t="0"/>
+          <a:stretch/>
+        </p:blipFill>
+        <p:spPr>
+          <a:xfrm>
+            <a:off x="2530550" y="1258175"/>
+            <a:ext cx="522302" cy="684892"/>
+          </a:xfrm>
+          <a:prstGeom prst="rect">
+            <a:avLst/>
+          </a:prstGeom>
+          <a:noFill/>
+          <a:ln>
+            <a:noFill/>
+          </a:ln>
+        </p:spPr>
+      </p:pic>
+      <p:sp>
+        <p:nvSpPr>
+          <p:cNvPr id="172" name="Google Shape;172;p19"/>
+          <p:cNvSpPr txBox="1"/>
+          <p:nvPr/>
+        </p:nvSpPr>
+        <p:spPr>
+          <a:xfrm>
+            <a:off x="2714426" y="620075"/>
+            <a:ext cx="2090700" cy="523200"/>
+          </a:xfrm>
+          <a:prstGeom prst="rect">
+            <a:avLst/>
+          </a:prstGeom>
+          <a:noFill/>
+          <a:ln>
+            <a:noFill/>
+          </a:ln>
+        </p:spPr>
+        <p:txBody>
+          <a:bodyPr anchorCtr="0" anchor="t" bIns="91425" lIns="91425" spcFirstLastPara="1" rIns="91425" wrap="square" tIns="91425">
+            <a:spAutoFit/>
+          </a:bodyPr>
+          <a:lstStyle/>
+          <a:p>
+            <a:pPr indent="0" lvl="0" marL="0" rtl="0" algn="l">
+              <a:spcBef>
+                <a:spcPts val="0"/>
+              </a:spcBef>
+              <a:spcAft>
+                <a:spcPts val="0"/>
+              </a:spcAft>
+              <a:buNone/>
+            </a:pPr>
+            <a:r>
+              <a:rPr b="1" lang="ja" sz="2200">
+                <a:solidFill>
+                  <a:schemeClr val="dk1"/>
+                </a:solidFill>
+              </a:rPr>
+              <a:t>2000年 1500年</a:t>
+            </a:r>
+            <a:endParaRPr b="1" sz="2200"/>
+          </a:p>
+        </p:txBody>
+      </p:sp>
+    </p:spTree>
+  </p:cSld>
+  <p:clrMapOvr>
+    <a:masterClrMapping/>
+  </p:clrMapOvr>
+</p:sld>
+</file>
+
+<file path=ppt/slides/slide8.xml><?xml version="1.0" encoding="utf-8"?>
+<p:sld xmlns:a="http://schemas.openxmlformats.org/drawingml/2006/main" xmlns:r="http://schemas.openxmlformats.org/officeDocument/2006/relationships" xmlns:mc="http://schemas.openxmlformats.org/markup-compatibility/2006" xmlns:mv="urn:schemas-microsoft-com:mac:vml" xmlns:p="http://schemas.openxmlformats.org/presentationml/2006/main" xmlns:c="http://schemas.openxmlformats.org/drawingml/2006/chart" xmlns:dgm="http://schemas.openxmlformats.org/drawingml/2006/diagram" xmlns:o="urn:schemas-microsoft-com:office:office" xmlns:v="urn:schemas-microsoft-com:vml" xmlns:pvml="urn:schemas-microsoft-com:office:powerpoint" xmlns:com="http://schemas.openxmlformats.org/drawingml/2006/compatibility" xmlns:p14="http://schemas.microsoft.com/office/powerpoint/2010/main" xmlns:p15="http://schemas.microsoft.com/office/powerpoint/2012/main" xmlns:ahyp="http://schemas.microsoft.com/office/drawing/2018/hyperlinkcolor">
+  <p:cSld>
+    <p:spTree>
+      <p:nvGrpSpPr>
+        <p:cNvPr id="176" name="Shape 176"/>
+        <p:cNvGrpSpPr/>
+        <p:nvPr/>
+      </p:nvGrpSpPr>
+      <p:grpSpPr>
+        <a:xfrm>
+          <a:off x="0" y="0"/>
+          <a:ext cx="0" cy="0"/>
+          <a:chOff x="0" y="0"/>
+          <a:chExt cx="0" cy="0"/>
+        </a:xfrm>
+      </p:grpSpPr>
+      <p:sp>
+        <p:nvSpPr>
+          <p:cNvPr id="177" name="Google Shape;177;p20"/>
+          <p:cNvSpPr/>
+          <p:nvPr/>
+        </p:nvSpPr>
+        <p:spPr>
+          <a:xfrm flipH="1">
+            <a:off x="1510684" y="620082"/>
+            <a:ext cx="4498200" cy="4192800"/>
+          </a:xfrm>
+          <a:prstGeom prst="flowChartConnector">
+            <a:avLst/>
+          </a:prstGeom>
+          <a:noFill/>
+          <a:ln cap="flat" cmpd="sng" w="65075">
+            <a:solidFill>
+              <a:srgbClr val="F4CCCC"/>
+            </a:solidFill>
+            <a:prstDash val="solid"/>
+            <a:round/>
+            <a:headEnd len="sm" w="sm" type="none"/>
+            <a:tailEnd len="sm" w="sm" type="none"/>
+          </a:ln>
+        </p:spPr>
+        <p:txBody>
+          <a:bodyPr anchorCtr="0" anchor="ctr" bIns="78075" lIns="78075" spcFirstLastPara="1" rIns="78075" wrap="square" tIns="78075">
+            <a:noAutofit/>
+          </a:bodyPr>
+          <a:lstStyle/>
+          <a:p>
+            <a:pPr indent="0" lvl="0" marL="0" rtl="0" algn="ctr">
+              <a:spcBef>
+                <a:spcPts val="0"/>
+              </a:spcBef>
+              <a:spcAft>
+                <a:spcPts val="0"/>
+              </a:spcAft>
+              <a:buNone/>
+            </a:pPr>
+            <a:r>
+              <a:t/>
+            </a:r>
+            <a:endParaRPr sz="1196">
+              <a:solidFill>
+                <a:schemeClr val="accent1"/>
+              </a:solidFill>
+              <a:highlight>
+                <a:schemeClr val="lt1"/>
+              </a:highlight>
+            </a:endParaRPr>
+          </a:p>
+        </p:txBody>
+      </p:sp>
+      <p:sp>
+        <p:nvSpPr>
+          <p:cNvPr id="178" name="Google Shape;178;p20"/>
+          <p:cNvSpPr/>
+          <p:nvPr/>
+        </p:nvSpPr>
+        <p:spPr>
+          <a:xfrm rot="-1960206">
+            <a:off x="2176412" y="908574"/>
+            <a:ext cx="444052" cy="335955"/>
+          </a:xfrm>
+          <a:prstGeom prst="notchedRightArrow">
+            <a:avLst>
+              <a:gd fmla="val 9770" name="adj1"/>
+              <a:gd fmla="val 71391" name="adj2"/>
+            </a:avLst>
+          </a:prstGeom>
+          <a:solidFill>
+            <a:srgbClr val="F4CCCC"/>
+          </a:solidFill>
+          <a:ln cap="flat" cmpd="sng" w="9525">
+            <a:solidFill>
+              <a:srgbClr val="F9CB9C"/>
+            </a:solidFill>
+            <a:prstDash val="solid"/>
+            <a:round/>
+            <a:headEnd len="sm" w="sm" type="none"/>
+            <a:tailEnd len="sm" w="sm" type="none"/>
+          </a:ln>
+        </p:spPr>
+        <p:txBody>
+          <a:bodyPr anchorCtr="0" anchor="ctr" bIns="91425" lIns="91425" spcFirstLastPara="1" rIns="91425" wrap="square" tIns="91425">
+            <a:noAutofit/>
+          </a:bodyPr>
+          <a:lstStyle/>
+          <a:p>
+            <a:pPr indent="0" lvl="0" marL="0" rtl="0" algn="ctr">
+              <a:spcBef>
+                <a:spcPts val="0"/>
+              </a:spcBef>
+              <a:spcAft>
+                <a:spcPts val="0"/>
+              </a:spcAft>
+              <a:buNone/>
+            </a:pPr>
+            <a:r>
+              <a:t/>
+            </a:r>
+            <a:endParaRPr/>
+          </a:p>
+        </p:txBody>
+      </p:sp>
+      <p:sp>
+        <p:nvSpPr>
+          <p:cNvPr id="179" name="Google Shape;179;p20"/>
+          <p:cNvSpPr/>
+          <p:nvPr/>
+        </p:nvSpPr>
+        <p:spPr>
+          <a:xfrm rot="-5400000">
+            <a:off x="1289245" y="2403740"/>
+            <a:ext cx="444000" cy="336000"/>
+          </a:xfrm>
+          <a:prstGeom prst="notchedRightArrow">
+            <a:avLst>
+              <a:gd fmla="val 9770" name="adj1"/>
+              <a:gd fmla="val 71391" name="adj2"/>
+            </a:avLst>
+          </a:prstGeom>
+          <a:solidFill>
+            <a:srgbClr val="F4CCCC"/>
+          </a:solidFill>
+          <a:ln cap="flat" cmpd="sng" w="9525">
+            <a:solidFill>
+              <a:srgbClr val="F9CB9C"/>
+            </a:solidFill>
+            <a:prstDash val="solid"/>
+            <a:round/>
+            <a:headEnd len="sm" w="sm" type="none"/>
+            <a:tailEnd len="sm" w="sm" type="none"/>
+          </a:ln>
+        </p:spPr>
+        <p:txBody>
+          <a:bodyPr anchorCtr="0" anchor="ctr" bIns="91425" lIns="91425" spcFirstLastPara="1" rIns="91425" wrap="square" tIns="91425">
+            <a:noAutofit/>
+          </a:bodyPr>
+          <a:lstStyle/>
+          <a:p>
+            <a:pPr indent="0" lvl="0" marL="0" rtl="0" algn="ctr">
+              <a:spcBef>
+                <a:spcPts val="0"/>
+              </a:spcBef>
+              <a:spcAft>
+                <a:spcPts val="0"/>
+              </a:spcAft>
+              <a:buNone/>
+            </a:pPr>
+            <a:r>
+              <a:t/>
+            </a:r>
+            <a:endParaRPr/>
+          </a:p>
+        </p:txBody>
+      </p:sp>
+      <p:sp>
+        <p:nvSpPr>
+          <p:cNvPr id="180" name="Google Shape;180;p20"/>
+          <p:cNvSpPr/>
+          <p:nvPr/>
+        </p:nvSpPr>
+        <p:spPr>
+          <a:xfrm rot="-8774089">
+            <a:off x="2312350" y="4311809"/>
+            <a:ext cx="444232" cy="336066"/>
+          </a:xfrm>
+          <a:prstGeom prst="notchedRightArrow">
+            <a:avLst>
+              <a:gd fmla="val 9770" name="adj1"/>
+              <a:gd fmla="val 71391" name="adj2"/>
+            </a:avLst>
+          </a:prstGeom>
+          <a:solidFill>
+            <a:srgbClr val="F4CCCC"/>
+          </a:solidFill>
+          <a:ln cap="flat" cmpd="sng" w="9525">
+            <a:solidFill>
+              <a:srgbClr val="F9CB9C"/>
+            </a:solidFill>
+            <a:prstDash val="solid"/>
+            <a:round/>
+            <a:headEnd len="sm" w="sm" type="none"/>
+            <a:tailEnd len="sm" w="sm" type="none"/>
+          </a:ln>
+        </p:spPr>
+        <p:txBody>
+          <a:bodyPr anchorCtr="0" anchor="ctr" bIns="91425" lIns="91425" spcFirstLastPara="1" rIns="91425" wrap="square" tIns="91425">
+            <a:noAutofit/>
+          </a:bodyPr>
+          <a:lstStyle/>
+          <a:p>
+            <a:pPr indent="0" lvl="0" marL="0" rtl="0" algn="ctr">
+              <a:spcBef>
+                <a:spcPts val="0"/>
+              </a:spcBef>
+              <a:spcAft>
+                <a:spcPts val="0"/>
+              </a:spcAft>
+              <a:buNone/>
+            </a:pPr>
+            <a:r>
+              <a:t/>
+            </a:r>
+            <a:endParaRPr/>
+          </a:p>
+        </p:txBody>
+      </p:sp>
+      <p:sp>
+        <p:nvSpPr>
+          <p:cNvPr id="181" name="Google Shape;181;p20"/>
+          <p:cNvSpPr/>
+          <p:nvPr/>
+        </p:nvSpPr>
+        <p:spPr>
+          <a:xfrm rot="7361461">
+            <a:off x="5515601" y="3508900"/>
+            <a:ext cx="443800" cy="336027"/>
+          </a:xfrm>
+          <a:prstGeom prst="notchedRightArrow">
+            <a:avLst>
+              <a:gd fmla="val 9770" name="adj1"/>
+              <a:gd fmla="val 71391" name="adj2"/>
+            </a:avLst>
+          </a:prstGeom>
+          <a:solidFill>
+            <a:srgbClr val="F4CCCC"/>
+          </a:solidFill>
+          <a:ln cap="flat" cmpd="sng" w="9525">
+            <a:solidFill>
+              <a:srgbClr val="F9CB9C"/>
+            </a:solidFill>
+            <a:prstDash val="solid"/>
+            <a:round/>
+            <a:headEnd len="sm" w="sm" type="none"/>
+            <a:tailEnd len="sm" w="sm" type="none"/>
+          </a:ln>
+        </p:spPr>
+        <p:txBody>
+          <a:bodyPr anchorCtr="0" anchor="ctr" bIns="91425" lIns="91425" spcFirstLastPara="1" rIns="91425" wrap="square" tIns="91425">
+            <a:noAutofit/>
+          </a:bodyPr>
+          <a:lstStyle/>
+          <a:p>
+            <a:pPr indent="0" lvl="0" marL="0" rtl="0" algn="ctr">
+              <a:spcBef>
+                <a:spcPts val="0"/>
+              </a:spcBef>
+              <a:spcAft>
+                <a:spcPts val="0"/>
+              </a:spcAft>
+              <a:buNone/>
+            </a:pPr>
+            <a:r>
+              <a:t/>
+            </a:r>
+            <a:endParaRPr/>
+          </a:p>
+        </p:txBody>
+      </p:sp>
+      <p:sp>
+        <p:nvSpPr>
+          <p:cNvPr id="182" name="Google Shape;182;p20"/>
+          <p:cNvSpPr/>
+          <p:nvPr/>
+        </p:nvSpPr>
+        <p:spPr>
+          <a:xfrm rot="3546158">
+            <a:off x="5337838" y="1367012"/>
+            <a:ext cx="444010" cy="336120"/>
+          </a:xfrm>
+          <a:prstGeom prst="notchedRightArrow">
+            <a:avLst>
+              <a:gd fmla="val 9770" name="adj1"/>
+              <a:gd fmla="val 71391" name="adj2"/>
+            </a:avLst>
+          </a:prstGeom>
+          <a:solidFill>
+            <a:srgbClr val="F4CCCC"/>
+          </a:solidFill>
+          <a:ln cap="flat" cmpd="sng" w="9525">
+            <a:solidFill>
+              <a:srgbClr val="F9CB9C"/>
+            </a:solidFill>
+            <a:prstDash val="solid"/>
+            <a:round/>
+            <a:headEnd len="sm" w="sm" type="none"/>
+            <a:tailEnd len="sm" w="sm" type="none"/>
+          </a:ln>
+        </p:spPr>
+        <p:txBody>
+          <a:bodyPr anchorCtr="0" anchor="ctr" bIns="91425" lIns="91425" spcFirstLastPara="1" rIns="91425" wrap="square" tIns="91425">
+            <a:noAutofit/>
+          </a:bodyPr>
+          <a:lstStyle/>
+          <a:p>
+            <a:pPr indent="0" lvl="0" marL="0" rtl="0" algn="ctr">
+              <a:spcBef>
+                <a:spcPts val="0"/>
+              </a:spcBef>
+              <a:spcAft>
+                <a:spcPts val="0"/>
+              </a:spcAft>
+              <a:buNone/>
+            </a:pPr>
+            <a:r>
+              <a:t/>
+            </a:r>
+            <a:endParaRPr/>
+          </a:p>
+        </p:txBody>
+      </p:sp>
+      <p:sp>
+        <p:nvSpPr>
+          <p:cNvPr id="183" name="Google Shape;183;p20"/>
+          <p:cNvSpPr txBox="1"/>
+          <p:nvPr/>
+        </p:nvSpPr>
+        <p:spPr>
+          <a:xfrm>
+            <a:off x="1555768" y="1895814"/>
+            <a:ext cx="1180800" cy="523200"/>
+          </a:xfrm>
+          <a:prstGeom prst="rect">
+            <a:avLst/>
+          </a:prstGeom>
+          <a:noFill/>
+          <a:ln>
+            <a:noFill/>
+          </a:ln>
+        </p:spPr>
+        <p:txBody>
+          <a:bodyPr anchorCtr="0" anchor="t" bIns="91425" lIns="91425" spcFirstLastPara="1" rIns="91425" wrap="square" tIns="91425">
+            <a:spAutoFit/>
+          </a:bodyPr>
+          <a:lstStyle/>
+          <a:p>
+            <a:pPr indent="0" lvl="0" marL="0" rtl="0" algn="l">
+              <a:spcBef>
+                <a:spcPts val="0"/>
+              </a:spcBef>
+              <a:spcAft>
+                <a:spcPts val="0"/>
+              </a:spcAft>
+              <a:buNone/>
+            </a:pPr>
+            <a:r>
+              <a:rPr b="1" lang="ja" sz="2200">
+                <a:solidFill>
+                  <a:schemeClr val="dk1"/>
+                </a:solidFill>
+              </a:rPr>
+              <a:t>1900年</a:t>
+            </a:r>
+            <a:endParaRPr b="1" sz="2200"/>
+          </a:p>
+        </p:txBody>
+      </p:sp>
+      <p:sp>
+        <p:nvSpPr>
+          <p:cNvPr id="184" name="Google Shape;184;p20"/>
+          <p:cNvSpPr txBox="1"/>
+          <p:nvPr/>
+        </p:nvSpPr>
+        <p:spPr>
+          <a:xfrm>
+            <a:off x="1988714" y="3810036"/>
+            <a:ext cx="1180800" cy="523200"/>
+          </a:xfrm>
+          <a:prstGeom prst="rect">
+            <a:avLst/>
+          </a:prstGeom>
+          <a:noFill/>
+          <a:ln>
+            <a:noFill/>
+          </a:ln>
+        </p:spPr>
+        <p:txBody>
+          <a:bodyPr anchorCtr="0" anchor="t" bIns="91425" lIns="91425" spcFirstLastPara="1" rIns="91425" wrap="square" tIns="91425">
+            <a:spAutoFit/>
+          </a:bodyPr>
+          <a:lstStyle/>
+          <a:p>
+            <a:pPr indent="0" lvl="0" marL="0" rtl="0" algn="l">
+              <a:spcBef>
+                <a:spcPts val="0"/>
+              </a:spcBef>
+              <a:spcAft>
+                <a:spcPts val="0"/>
+              </a:spcAft>
+              <a:buNone/>
+            </a:pPr>
+            <a:r>
+              <a:rPr b="1" lang="ja" sz="2200">
+                <a:solidFill>
+                  <a:schemeClr val="dk1"/>
+                </a:solidFill>
+              </a:rPr>
+              <a:t>1800年</a:t>
+            </a:r>
+            <a:endParaRPr b="1" sz="2200"/>
+          </a:p>
+        </p:txBody>
+      </p:sp>
+      <p:sp>
+        <p:nvSpPr>
+          <p:cNvPr id="185" name="Google Shape;185;p20"/>
+          <p:cNvSpPr txBox="1"/>
+          <p:nvPr/>
+        </p:nvSpPr>
+        <p:spPr>
+          <a:xfrm>
+            <a:off x="4571993" y="3810021"/>
+            <a:ext cx="1180800" cy="523200"/>
+          </a:xfrm>
+          <a:prstGeom prst="rect">
+            <a:avLst/>
+          </a:prstGeom>
+          <a:noFill/>
+          <a:ln>
+            <a:noFill/>
+          </a:ln>
+        </p:spPr>
+        <p:txBody>
+          <a:bodyPr anchorCtr="0" anchor="t" bIns="91425" lIns="91425" spcFirstLastPara="1" rIns="91425" wrap="square" tIns="91425">
+            <a:spAutoFit/>
+          </a:bodyPr>
+          <a:lstStyle/>
+          <a:p>
+            <a:pPr indent="0" lvl="0" marL="0" rtl="0" algn="l">
+              <a:spcBef>
+                <a:spcPts val="0"/>
+              </a:spcBef>
+              <a:spcAft>
+                <a:spcPts val="0"/>
+              </a:spcAft>
+              <a:buNone/>
+            </a:pPr>
+            <a:r>
+              <a:rPr b="1" lang="ja" sz="2200">
+                <a:solidFill>
+                  <a:schemeClr val="dk1"/>
+                </a:solidFill>
+              </a:rPr>
+              <a:t>1700年</a:t>
+            </a:r>
+            <a:endParaRPr b="1" sz="2200"/>
+          </a:p>
+        </p:txBody>
+      </p:sp>
+      <p:sp>
+        <p:nvSpPr>
+          <p:cNvPr id="186" name="Google Shape;186;p20"/>
+          <p:cNvSpPr txBox="1"/>
+          <p:nvPr/>
+        </p:nvSpPr>
+        <p:spPr>
+          <a:xfrm>
+            <a:off x="4969600" y="1889564"/>
+            <a:ext cx="1180800" cy="523200"/>
+          </a:xfrm>
+          <a:prstGeom prst="rect">
+            <a:avLst/>
+          </a:prstGeom>
+          <a:noFill/>
+          <a:ln>
+            <a:noFill/>
+          </a:ln>
+        </p:spPr>
+        <p:txBody>
+          <a:bodyPr anchorCtr="0" anchor="t" bIns="91425" lIns="91425" spcFirstLastPara="1" rIns="91425" wrap="square" tIns="91425">
+            <a:spAutoFit/>
+          </a:bodyPr>
+          <a:lstStyle/>
+          <a:p>
+            <a:pPr indent="0" lvl="0" marL="0" rtl="0" algn="l">
+              <a:spcBef>
+                <a:spcPts val="0"/>
+              </a:spcBef>
+              <a:spcAft>
+                <a:spcPts val="0"/>
+              </a:spcAft>
+              <a:buNone/>
+            </a:pPr>
+            <a:r>
+              <a:rPr b="1" lang="ja" sz="2200">
+                <a:solidFill>
+                  <a:schemeClr val="dk1"/>
+                </a:solidFill>
+              </a:rPr>
+              <a:t>1600年</a:t>
+            </a:r>
+            <a:endParaRPr b="1" sz="2200"/>
+          </a:p>
+        </p:txBody>
+      </p:sp>
+      <p:pic>
+        <p:nvPicPr>
+          <p:cNvPr id="187" name="Google Shape;187;p20" title="マゼラン.png"/>
+          <p:cNvPicPr preferRelativeResize="0"/>
+          <p:nvPr/>
+        </p:nvPicPr>
+        <p:blipFill>
+          <a:blip r:embed="rId3">
+            <a:alphaModFix/>
+          </a:blip>
+          <a:stretch>
+            <a:fillRect/>
+          </a:stretch>
+        </p:blipFill>
+        <p:spPr>
+          <a:xfrm>
+            <a:off x="4200325" y="1154475"/>
+            <a:ext cx="743350" cy="811450"/>
+          </a:xfrm>
+          <a:prstGeom prst="rect">
+            <a:avLst/>
+          </a:prstGeom>
+          <a:noFill/>
+          <a:ln>
+            <a:noFill/>
+          </a:ln>
+        </p:spPr>
+      </p:pic>
+      <p:pic>
+        <p:nvPicPr>
+          <p:cNvPr id="188" name="Google Shape;188;p20" title="Isaac_Newtonlis.jpg"/>
+          <p:cNvPicPr preferRelativeResize="0"/>
+          <p:nvPr/>
+        </p:nvPicPr>
+        <p:blipFill rotWithShape="1">
+          <a:blip r:embed="rId4">
+            <a:alphaModFix/>
+          </a:blip>
+          <a:srcRect b="53655" l="24529" r="24863" t="4672"/>
+          <a:stretch/>
+        </p:blipFill>
+        <p:spPr>
+          <a:xfrm>
+            <a:off x="4636800" y="2793738"/>
+            <a:ext cx="848701" cy="855795"/>
+          </a:xfrm>
+          <a:prstGeom prst="rect">
+            <a:avLst/>
+          </a:prstGeom>
+          <a:noFill/>
+          <a:ln>
+            <a:noFill/>
+          </a:ln>
+          <a:effectLst>
+            <a:outerShdw blurRad="57150" rotWithShape="0" algn="bl" dir="5400000" dist="19050">
+              <a:srgbClr val="000000">
+                <a:alpha val="50000"/>
+              </a:srgbClr>
+            </a:outerShdw>
+          </a:effectLst>
+        </p:spPr>
+      </p:pic>
+      <p:pic>
+        <p:nvPicPr>
+          <p:cNvPr id="189" name="Google Shape;189;p20" title="florence-nightingale.jpg"/>
+          <p:cNvPicPr preferRelativeResize="0"/>
+          <p:nvPr/>
+        </p:nvPicPr>
+        <p:blipFill>
+          <a:blip r:embed="rId5">
+            <a:alphaModFix/>
+          </a:blip>
+          <a:stretch>
+            <a:fillRect/>
+          </a:stretch>
+        </p:blipFill>
+        <p:spPr>
+          <a:xfrm>
+            <a:off x="2207450" y="2865541"/>
+            <a:ext cx="743350" cy="904700"/>
+          </a:xfrm>
+          <a:prstGeom prst="rect">
+            <a:avLst/>
+          </a:prstGeom>
+          <a:noFill/>
+          <a:ln>
+            <a:noFill/>
+          </a:ln>
+        </p:spPr>
+      </p:pic>
+      <p:pic>
+        <p:nvPicPr>
+          <p:cNvPr id="190" name="Google Shape;190;p20" title="015966.jpg"/>
+          <p:cNvPicPr preferRelativeResize="0"/>
+          <p:nvPr/>
+        </p:nvPicPr>
+        <p:blipFill>
+          <a:blip r:embed="rId6">
+            <a:alphaModFix/>
+          </a:blip>
+          <a:stretch>
+            <a:fillRect/>
+          </a:stretch>
+        </p:blipFill>
+        <p:spPr>
+          <a:xfrm>
+            <a:off x="3203397" y="2020337"/>
+            <a:ext cx="1180800" cy="1392282"/>
+          </a:xfrm>
+          <a:prstGeom prst="rect">
+            <a:avLst/>
+          </a:prstGeom>
+          <a:noFill/>
+          <a:ln>
+            <a:noFill/>
+          </a:ln>
+        </p:spPr>
+      </p:pic>
+      <p:pic>
+        <p:nvPicPr>
+          <p:cNvPr id="191" name="Google Shape;191;p20" title="neil-armstrong.jpg"/>
+          <p:cNvPicPr preferRelativeResize="0"/>
+          <p:nvPr/>
+        </p:nvPicPr>
+        <p:blipFill rotWithShape="1">
+          <a:blip r:embed="rId7">
+            <a:alphaModFix/>
+          </a:blip>
+          <a:srcRect b="0" l="0" r="2931" t="0"/>
+          <a:stretch/>
+        </p:blipFill>
+        <p:spPr>
+          <a:xfrm>
+            <a:off x="2530550" y="1258175"/>
+            <a:ext cx="522302" cy="684892"/>
+          </a:xfrm>
+          <a:prstGeom prst="rect">
+            <a:avLst/>
+          </a:prstGeom>
+          <a:noFill/>
+          <a:ln>
+            <a:noFill/>
+          </a:ln>
+        </p:spPr>
+      </p:pic>
+      <p:sp>
+        <p:nvSpPr>
+          <p:cNvPr id="192" name="Google Shape;192;p20"/>
+          <p:cNvSpPr txBox="1"/>
+          <p:nvPr/>
+        </p:nvSpPr>
+        <p:spPr>
+          <a:xfrm>
+            <a:off x="2714426" y="620075"/>
+            <a:ext cx="2090700" cy="523200"/>
+          </a:xfrm>
+          <a:prstGeom prst="rect">
+            <a:avLst/>
+          </a:prstGeom>
+          <a:noFill/>
+          <a:ln>
+            <a:noFill/>
+          </a:ln>
+        </p:spPr>
+        <p:txBody>
+          <a:bodyPr anchorCtr="0" anchor="t" bIns="91425" lIns="91425" spcFirstLastPara="1" rIns="91425" wrap="square" tIns="91425">
+            <a:spAutoFit/>
+          </a:bodyPr>
+          <a:lstStyle/>
+          <a:p>
+            <a:pPr indent="0" lvl="0" marL="0" rtl="0" algn="l">
+              <a:spcBef>
+                <a:spcPts val="0"/>
+              </a:spcBef>
+              <a:spcAft>
+                <a:spcPts val="0"/>
+              </a:spcAft>
+              <a:buNone/>
+            </a:pPr>
+            <a:r>
+              <a:rPr b="1" lang="ja" sz="2200">
+                <a:solidFill>
+                  <a:schemeClr val="dk1"/>
+                </a:solidFill>
+              </a:rPr>
+              <a:t>2000年 1500年</a:t>
+            </a:r>
+            <a:endParaRPr b="1" sz="2200"/>
+          </a:p>
+        </p:txBody>
+      </p:sp>
+    </p:spTree>
+  </p:cSld>
+  <p:clrMapOvr>
+    <a:masterClrMapping/>
+  </p:clrMapOvr>
+</p:sld>
+</file>
+
 <file path=ppt/theme/theme1.xml><?xml version="1.0" encoding="utf-8"?>
 <a:theme xmlns:a="http://schemas.openxmlformats.org/drawingml/2006/main" xmlns:r="http://schemas.openxmlformats.org/officeDocument/2006/relationships" name="Simple Light">
   <a:themeElements>
